--- a/docs/10-product/공모전/원본-공모전제출/기능설명서_2026-09-20.pptx
+++ b/docs/10-product/공모전/원본-공모전제출/기능설명서_2026-09-20.pptx
@@ -1716,7 +1716,7 @@
                             <a:srgbClr val="000000"/>
                           </a:solidFill>
                         </a:rPr>
-                        <a:t>(팀명 기입)</a:t>
+                        <a:t>visitholykorea</a:t>
                       </a:r>
                       <a:endParaRPr lang="ko-KR" altLang="en-US" sz="2400" b="0">
                         <a:solidFill>
@@ -1832,7 +1832,7 @@
                             <a:srgbClr val="000000"/>
                           </a:solidFill>
                         </a:rPr>
-                        <a:t>VisitHolyKorea — 길 위에서 나를 만나는 성지순례</a:t>
+                        <a:t>VisitHolyKorea (한국 천주교 성지순례)</a:t>
                       </a:r>
                       <a:endParaRPr lang="ko-KR" altLang="en-US" sz="2400" b="0">
                         <a:solidFill>

--- a/docs/10-product/공모전/원본-공모전제출/기능설명서_2026-09-20.pptx
+++ b/docs/10-product/공모전/원본-공모전제출/기능설명서_2026-09-20.pptx
@@ -3024,7 +3024,7 @@
                             <a:srgbClr val="000000"/>
                           </a:solidFill>
                         </a:rPr>
-                        <a:t>#오디오도슨트</a:t>
+                        <a:t>#오디오가이드</a:t>
                       </a:r>
                       <a:endParaRPr lang="ko-KR" altLang="en-US" b="0" i="1" dirty="0">
                         <a:solidFill>
@@ -3195,7 +3195,7 @@
                             <a:srgbClr val="000000"/>
                           </a:solidFill>
                         </a:rPr>
-                        <a:t>성지 소개글 · 지점별 오디오 가이드</a:t>
+                        <a:t>성지 이야기 · 지점별 오디오 가이드</a:t>
                       </a:r>
                       <a:endParaRPr lang="ko-KR" altLang="en-US" b="0" i="1" dirty="0">
                         <a:solidFill>
@@ -6642,7 +6642,7 @@
                             <a:srgbClr val="000000"/>
                           </a:solidFill>
                         </a:rPr>
-                        <a:t>「내포, 신앙의 못자리 길」 「내포 도보 순례길 ① 솔뫼에서 해미까지(40km)」처럼 사건·인물로 성지 4~6곳을 잇는 코스를 제공한다. 코스와 성지 상세에서 관광공사 두루누비(Durunubi) 걷기길과 무장애 관광정보(KorWithService2)를 실시간으로 함께 보여 준다. 코스 상세에서 각 성지 상세(소개글·도슨트·주변 정보)로 바로 이어진다.</a:t>
+                        <a:t>「내포, 신앙의 못자리 길」 「내포 도보 순례길 ① 솔뫼에서 해미까지(40km)」처럼 사건·인물로 성지 4~6곳을 잇는 코스를 제공한다. 코스와 성지 상세에서 관광공사 두루누비(Durunubi) 걷기길과 무장애 관광정보(KorWithService2)를 실시간으로 함께 보여 준다. 코스 상세에서 각 성지 상세(성지 이야기·오디오 가이드·둘러볼 곳)로 바로 이어진다.</a:t>
                       </a:r>
                       <a:endParaRPr lang="en-US" altLang="ko-KR" b="0" dirty="0" smtClean="0">
                         <a:solidFill>
@@ -7458,7 +7458,7 @@
                             <a:srgbClr val="000000"/>
                           </a:solidFill>
                         </a:rPr>
-                        <a:t>전국 천주교 성지 206곳을 "오늘 마음"에 맞춰 골라 주고, 한국관광공사 TourAPI 실시간 데이터(집중률·축제·주변 관광지·걷기길)로 하루 일정을 짜 주며, 현장에서는 6개 국어 오디오 도슨트로 안내하는 순례 여행 서비스</a:t>
+                        <a:t>전국 천주교 성지 206곳을 "오늘 마음"에 맞춰 골라 주고, 한국관광공사 TourAPI 실시간 데이터(집중률·축제·주변 관광지·걷기길)로 하루 일정을 짜 주며, 현장에서는 6개 국어 오디오 가이드로 안내하는 순례 여행 서비스</a:t>
                       </a:r>
                     </a:p>
                   </a:txBody>
@@ -8169,7 +8169,7 @@
                             <a:srgbClr val="000000"/>
                           </a:solidFill>
                         </a:rPr>
-                        <a:t>4) 현장 체류의 질을 높이는 콘텐츠 — 성지마다 직접 쓴 소개글과 지점별 오디오 도슨트(6개 국어), 성지 DB 안에서만 답하는 AI 가이드.</a:t>
+                        <a:t>4) 현장 체류의 질을 높이는 콘텐츠 — 성지마다 직접 쓴 소개글과 지점별 오디오 가이드(6개 국어), 성지 DB 안에서만 답하는 AI 가이드.</a:t>
                       </a:r>
                     </a:p>
                     <a:p>
@@ -8353,7 +8353,7 @@
                             <a:srgbClr val="000000"/>
                           </a:solidFill>
                         </a:rPr>
-                        <a:t>#오늘의성지일정  #오디오도슨트  #순례가이드미카엘  #순례코스</a:t>
+                        <a:t>#오늘의성지일정  #오디오가이드  #순례가이드미카엘  #순례코스</a:t>
                       </a:r>
                     </a:p>
                   </a:txBody>
@@ -9076,7 +9076,7 @@
                             <a:srgbClr val="000000"/>
                           </a:solidFill>
                         </a:rPr>
-                        <a:t>#오디오도슨트</a:t>
+                        <a:t>#오디오가이드</a:t>
                       </a:r>
                       <a:endParaRPr lang="en-US" altLang="ko-KR" sz="1800" b="0" baseline="0" smtClean="0">
                         <a:solidFill>
@@ -9162,7 +9162,7 @@
                             <a:srgbClr val="000000"/>
                           </a:solidFill>
                         </a:rPr>
-                        <a:t>성지 소개글 · 지점별 오디오 가이드</a:t>
+                        <a:t>성지 이야기 · 지점별 오디오 가이드</a:t>
                       </a:r>
                       <a:endParaRPr lang="en-US" altLang="ko-KR" sz="1800" b="0" baseline="0" smtClean="0">
                         <a:solidFill>
@@ -9844,7 +9844,7 @@
                             <a:srgbClr val="000000"/>
                           </a:solidFill>
                         </a:rPr>
-                        <a:t>코스 상세에서 각 성지 상세(소개글·도슨트·주변 정보)로 바로 이어진다.</a:t>
+                        <a:t>코스 상세에서 각 성지 상세(성지 이야기·오디오 가이드·둘러볼 곳)로 바로 이어진다.</a:t>
                       </a:r>
                     </a:p>
                   </a:txBody>
@@ -12681,7 +12681,7 @@
                             <a:srgbClr val="000000"/>
                           </a:solidFill>
                         </a:rPr>
-                        <a:t>locationBasedList2 로 성지 주변 관광지·식당(하루 일정 점심·오후, 성지 상세 「주변 관광」), searchFestival2 로 오늘 진행 중인 전국 축제(인근 혼잡도 산식의 30%), searchKeyword2·areaBasedList2 로 관광지 검색, ldongCode2 로 집중률 조회에 필요한 시·군·구 코드. 매 화면 진입마다 실시간 호출(staleTime 0), DB·서비스워커에 저장하지 않음.</a:t>
+                        <a:t>locationBasedList2 로 성지 주변 관광지·식당(하루 일정 점심·오후, 성지 상세 「둘러볼 곳」), searchFestival2 로 오늘 진행 중인 전국 축제(인근 혼잡도 산식의 30%), searchKeyword2·areaBasedList2 로 관광지 검색, ldongCode2 로 집중률 조회에 필요한 시·군·구 코드. 매 화면 진입마다 실시간 호출(staleTime 0), DB·서비스워커에 저장하지 않음.</a:t>
                       </a:r>
                     </a:p>
                   </a:txBody>
@@ -14792,7 +14792,7 @@
                             <a:srgbClr val="000000"/>
                           </a:solidFill>
                         </a:rPr>
-                        <a:t>교구 홈페이지·굿뉴스 성지 안내·현장 취재로 직접 수집한 성지 206곳의 주소·연락처·미사 시간·역사와, 성지마다 6개 국어 소개글 + 지점별 오디오 도슨트 원고. 대표 사진은 직접 촬영·교구 홍보국 제공분(출처·라이선스 표기). Supabase(PostgreSQL) 저장.</a:t>
+                        <a:t>교구 홈페이지·굿뉴스 성지 안내·현장 취재로 직접 수집한 성지 206곳의 주소·연락처·미사 시간·역사와, 성지마다 6개 국어 소개글 + 지점별 오디오 가이드 원고. 대표 사진은 직접 촬영·교구 홍보국 제공분(출처·라이선스 표기). Supabase(PostgreSQL) 저장.</a:t>
                       </a:r>
                       <a:endParaRPr lang="ko-KR" altLang="en-US" b="0">
                         <a:solidFill>
@@ -15810,7 +15810,7 @@
                             <a:srgbClr val="000000"/>
                           </a:solidFill>
                         </a:rPr>
-                        <a:t>• 콘텐츠를 직접 만들었다 — 성지 206곳 소개글 6개 국어, 지점별 오디오 도슨트 원고, 출처 URL 을 모든 원고에 표기. 기존 관광 앱이 다루지 않는 종교 유산 층위.</a:t>
+                        <a:t>• 콘텐츠를 직접 만들었다 — 성지 206곳 소개글 6개 국어, 지점별 오디오 가이드 원고, 출처 URL 을 모든 원고에 표기. 기존 관광 앱이 다루지 않는 종교 유산 층위.</a:t>
                       </a:r>
                     </a:p>
                     <a:p>
